--- a/docs/deck/brief_appendix.pptx
+++ b/docs/deck/brief_appendix.pptx
@@ -3367,7 +3367,7 @@
                   <a:srgbClr val="000000"/>
                 </a:solidFill>
               </a:rPr>
-              <a:t>2026-09-23 · pack commit ed2b3c205588 · cycle of record scan_2026-09-10_rj4</a:t>
+              <a:t>2026-09-24 · pack commit 12d578c3a02b · cycle of record scan_2026-09-10_rj4</a:t>
             </a:r>
           </a:p>
         </p:txBody>

--- a/docs/deck/brief_appendix.pptx
+++ b/docs/deck/brief_appendix.pptx
@@ -3367,7 +3367,7 @@
                   <a:srgbClr val="000000"/>
                 </a:solidFill>
               </a:rPr>
-              <a:t>2026-09-24 · pack commit 12d578c3a02b · cycle of record scan_2026-09-10_rj4</a:t>
+              <a:t>2026-09-24 · pack commit e7690476176e · cycle of record scan_2026-09-10_rj4</a:t>
             </a:r>
           </a:p>
         </p:txBody>
